--- a/SW_Bootcamp_13기_최종제출/SW_Bootcamp_13기_A반_3팀_포스터.pptx
+++ b/SW_Bootcamp_13기_최종제출/SW_Bootcamp_13기_A반_3팀_포스터.pptx
@@ -2,12 +2,12 @@
 <file path=ppt/presentation.xml><?xml version="1.0" encoding="utf-8"?>
 <p:presentation xmlns:a="http://schemas.openxmlformats.org/drawingml/2006/main" xmlns:r="http://schemas.openxmlformats.org/officeDocument/2006/relationships" xmlns:p="http://schemas.openxmlformats.org/presentationml/2006/main" saveSubsetFonts="1" autoCompressPictures="0">
   <p:sldMasterIdLst>
-    <p:sldMasterId id="2147483696" r:id="rId1"/>
+    <p:sldMasterId id="2147483708" r:id="rId1"/>
   </p:sldMasterIdLst>
   <p:sldIdLst>
     <p:sldId id="256" r:id="rId2"/>
   </p:sldIdLst>
-  <p:sldSz cx="5572125" cy="9907588"/>
+  <p:sldSz cx="5572125" cy="7462838"/>
   <p:notesSz cx="6858000" cy="9144000"/>
   <p:defaultTextStyle>
     <a:defPPr>
@@ -136,8 +136,8 @@
         </p:nvSpPr>
         <p:spPr>
           <a:xfrm>
-            <a:off x="417910" y="1621451"/>
-            <a:ext cx="4736306" cy="3449308"/>
+            <a:off x="417910" y="1221349"/>
+            <a:ext cx="4736306" cy="2598173"/>
           </a:xfrm>
         </p:spPr>
         <p:txBody>
@@ -168,8 +168,8 @@
         </p:nvSpPr>
         <p:spPr>
           <a:xfrm>
-            <a:off x="696516" y="5203778"/>
-            <a:ext cx="4179094" cy="2392040"/>
+            <a:off x="696516" y="3919718"/>
+            <a:ext cx="4179094" cy="1801791"/>
           </a:xfrm>
         </p:spPr>
         <p:txBody>
@@ -289,7 +289,7 @@
     </p:spTree>
     <p:extLst>
       <p:ext uri="{BB962C8B-B14F-4D97-AF65-F5344CB8AC3E}">
-        <p14:creationId xmlns:p14="http://schemas.microsoft.com/office/powerpoint/2010/main" val="3922329461"/>
+        <p14:creationId xmlns:p14="http://schemas.microsoft.com/office/powerpoint/2010/main" val="1396707474"/>
       </p:ext>
     </p:extLst>
   </p:cSld>
@@ -459,7 +459,7 @@
     </p:spTree>
     <p:extLst>
       <p:ext uri="{BB962C8B-B14F-4D97-AF65-F5344CB8AC3E}">
-        <p14:creationId xmlns:p14="http://schemas.microsoft.com/office/powerpoint/2010/main" val="1615320569"/>
+        <p14:creationId xmlns:p14="http://schemas.microsoft.com/office/powerpoint/2010/main" val="632484811"/>
       </p:ext>
     </p:extLst>
   </p:cSld>
@@ -498,8 +498,8 @@
         </p:nvSpPr>
         <p:spPr>
           <a:xfrm>
-            <a:off x="3987552" y="527487"/>
-            <a:ext cx="1201489" cy="8396223"/>
+            <a:off x="3987552" y="397327"/>
+            <a:ext cx="1201489" cy="6324410"/>
           </a:xfrm>
         </p:spPr>
         <p:txBody>
@@ -526,8 +526,8 @@
         </p:nvSpPr>
         <p:spPr>
           <a:xfrm>
-            <a:off x="383084" y="527487"/>
-            <a:ext cx="3534817" cy="8396223"/>
+            <a:off x="383084" y="397327"/>
+            <a:ext cx="3534817" cy="6324410"/>
           </a:xfrm>
         </p:spPr>
         <p:txBody>
@@ -639,7 +639,7 @@
     </p:spTree>
     <p:extLst>
       <p:ext uri="{BB962C8B-B14F-4D97-AF65-F5344CB8AC3E}">
-        <p14:creationId xmlns:p14="http://schemas.microsoft.com/office/powerpoint/2010/main" val="1552149372"/>
+        <p14:creationId xmlns:p14="http://schemas.microsoft.com/office/powerpoint/2010/main" val="2765237121"/>
       </p:ext>
     </p:extLst>
   </p:cSld>
@@ -809,7 +809,7 @@
     </p:spTree>
     <p:extLst>
       <p:ext uri="{BB962C8B-B14F-4D97-AF65-F5344CB8AC3E}">
-        <p14:creationId xmlns:p14="http://schemas.microsoft.com/office/powerpoint/2010/main" val="2485573423"/>
+        <p14:creationId xmlns:p14="http://schemas.microsoft.com/office/powerpoint/2010/main" val="1589087799"/>
       </p:ext>
     </p:extLst>
   </p:cSld>
@@ -848,8 +848,8 @@
         </p:nvSpPr>
         <p:spPr>
           <a:xfrm>
-            <a:off x="380182" y="2470019"/>
-            <a:ext cx="4805958" cy="4121281"/>
+            <a:off x="380182" y="1860529"/>
+            <a:ext cx="4805958" cy="3104333"/>
           </a:xfrm>
         </p:spPr>
         <p:txBody>
@@ -880,8 +880,8 @@
         </p:nvSpPr>
         <p:spPr>
           <a:xfrm>
-            <a:off x="380182" y="6630289"/>
-            <a:ext cx="4805958" cy="2167284"/>
+            <a:off x="380182" y="4994230"/>
+            <a:ext cx="4805958" cy="1632495"/>
           </a:xfrm>
         </p:spPr>
         <p:txBody>
@@ -1055,7 +1055,7 @@
     </p:spTree>
     <p:extLst>
       <p:ext uri="{BB962C8B-B14F-4D97-AF65-F5344CB8AC3E}">
-        <p14:creationId xmlns:p14="http://schemas.microsoft.com/office/powerpoint/2010/main" val="2321183965"/>
+        <p14:creationId xmlns:p14="http://schemas.microsoft.com/office/powerpoint/2010/main" val="464467268"/>
       </p:ext>
     </p:extLst>
   </p:cSld>
@@ -1117,8 +1117,8 @@
         </p:nvSpPr>
         <p:spPr>
           <a:xfrm>
-            <a:off x="383084" y="2637436"/>
-            <a:ext cx="2368153" cy="6286274"/>
+            <a:off x="383084" y="1986635"/>
+            <a:ext cx="2368153" cy="4735102"/>
           </a:xfrm>
         </p:spPr>
         <p:txBody>
@@ -1174,8 +1174,8 @@
         </p:nvSpPr>
         <p:spPr>
           <a:xfrm>
-            <a:off x="2820888" y="2637436"/>
-            <a:ext cx="2368153" cy="6286274"/>
+            <a:off x="2820888" y="1986635"/>
+            <a:ext cx="2368153" cy="4735102"/>
           </a:xfrm>
         </p:spPr>
         <p:txBody>
@@ -1287,7 +1287,7 @@
     </p:spTree>
     <p:extLst>
       <p:ext uri="{BB962C8B-B14F-4D97-AF65-F5344CB8AC3E}">
-        <p14:creationId xmlns:p14="http://schemas.microsoft.com/office/powerpoint/2010/main" val="3786749260"/>
+        <p14:creationId xmlns:p14="http://schemas.microsoft.com/office/powerpoint/2010/main" val="1648618998"/>
       </p:ext>
     </p:extLst>
   </p:cSld>
@@ -1326,8 +1326,8 @@
         </p:nvSpPr>
         <p:spPr>
           <a:xfrm>
-            <a:off x="383809" y="527490"/>
-            <a:ext cx="4805958" cy="1915009"/>
+            <a:off x="383809" y="397329"/>
+            <a:ext cx="4805958" cy="1442470"/>
           </a:xfrm>
         </p:spPr>
         <p:txBody>
@@ -1354,8 +1354,8 @@
         </p:nvSpPr>
         <p:spPr>
           <a:xfrm>
-            <a:off x="383810" y="2428736"/>
-            <a:ext cx="2357270" cy="1190286"/>
+            <a:off x="383810" y="1829432"/>
+            <a:ext cx="2357270" cy="896577"/>
           </a:xfrm>
         </p:spPr>
         <p:txBody>
@@ -1419,8 +1419,8 @@
         </p:nvSpPr>
         <p:spPr>
           <a:xfrm>
-            <a:off x="383810" y="3619022"/>
-            <a:ext cx="2357270" cy="5323036"/>
+            <a:off x="383810" y="2726009"/>
+            <a:ext cx="2357270" cy="4009548"/>
           </a:xfrm>
         </p:spPr>
         <p:txBody>
@@ -1476,8 +1476,8 @@
         </p:nvSpPr>
         <p:spPr>
           <a:xfrm>
-            <a:off x="2820889" y="2428736"/>
-            <a:ext cx="2368879" cy="1190286"/>
+            <a:off x="2820889" y="1829432"/>
+            <a:ext cx="2368879" cy="896577"/>
           </a:xfrm>
         </p:spPr>
         <p:txBody>
@@ -1541,8 +1541,8 @@
         </p:nvSpPr>
         <p:spPr>
           <a:xfrm>
-            <a:off x="2820889" y="3619022"/>
-            <a:ext cx="2368879" cy="5323036"/>
+            <a:off x="2820889" y="2726009"/>
+            <a:ext cx="2368879" cy="4009548"/>
           </a:xfrm>
         </p:spPr>
         <p:txBody>
@@ -1654,7 +1654,7 @@
     </p:spTree>
     <p:extLst>
       <p:ext uri="{BB962C8B-B14F-4D97-AF65-F5344CB8AC3E}">
-        <p14:creationId xmlns:p14="http://schemas.microsoft.com/office/powerpoint/2010/main" val="813295956"/>
+        <p14:creationId xmlns:p14="http://schemas.microsoft.com/office/powerpoint/2010/main" val="2465340032"/>
       </p:ext>
     </p:extLst>
   </p:cSld>
@@ -1772,7 +1772,7 @@
     </p:spTree>
     <p:extLst>
       <p:ext uri="{BB962C8B-B14F-4D97-AF65-F5344CB8AC3E}">
-        <p14:creationId xmlns:p14="http://schemas.microsoft.com/office/powerpoint/2010/main" val="558781852"/>
+        <p14:creationId xmlns:p14="http://schemas.microsoft.com/office/powerpoint/2010/main" val="3422431703"/>
       </p:ext>
     </p:extLst>
   </p:cSld>
@@ -1867,7 +1867,7 @@
     </p:spTree>
     <p:extLst>
       <p:ext uri="{BB962C8B-B14F-4D97-AF65-F5344CB8AC3E}">
-        <p14:creationId xmlns:p14="http://schemas.microsoft.com/office/powerpoint/2010/main" val="1696259065"/>
+        <p14:creationId xmlns:p14="http://schemas.microsoft.com/office/powerpoint/2010/main" val="3692146147"/>
       </p:ext>
     </p:extLst>
   </p:cSld>
@@ -1906,8 +1906,8 @@
         </p:nvSpPr>
         <p:spPr>
           <a:xfrm>
-            <a:off x="383810" y="660506"/>
-            <a:ext cx="1797155" cy="2311771"/>
+            <a:off x="383810" y="497522"/>
+            <a:ext cx="1797155" cy="1741329"/>
           </a:xfrm>
         </p:spPr>
         <p:txBody>
@@ -1938,8 +1938,8 @@
         </p:nvSpPr>
         <p:spPr>
           <a:xfrm>
-            <a:off x="2368879" y="1426511"/>
-            <a:ext cx="2820888" cy="7040809"/>
+            <a:off x="2368879" y="1074512"/>
+            <a:ext cx="2820888" cy="5303452"/>
           </a:xfrm>
         </p:spPr>
         <p:txBody>
@@ -2023,8 +2023,8 @@
         </p:nvSpPr>
         <p:spPr>
           <a:xfrm>
-            <a:off x="383810" y="2972276"/>
-            <a:ext cx="1797155" cy="5506510"/>
+            <a:off x="383810" y="2238851"/>
+            <a:ext cx="1797155" cy="4147749"/>
           </a:xfrm>
         </p:spPr>
         <p:txBody>
@@ -2144,7 +2144,7 @@
     </p:spTree>
     <p:extLst>
       <p:ext uri="{BB962C8B-B14F-4D97-AF65-F5344CB8AC3E}">
-        <p14:creationId xmlns:p14="http://schemas.microsoft.com/office/powerpoint/2010/main" val="1813877780"/>
+        <p14:creationId xmlns:p14="http://schemas.microsoft.com/office/powerpoint/2010/main" val="2885594737"/>
       </p:ext>
     </p:extLst>
   </p:cSld>
@@ -2183,8 +2183,8 @@
         </p:nvSpPr>
         <p:spPr>
           <a:xfrm>
-            <a:off x="383810" y="660506"/>
-            <a:ext cx="1797155" cy="2311771"/>
+            <a:off x="383810" y="497522"/>
+            <a:ext cx="1797155" cy="1741329"/>
           </a:xfrm>
         </p:spPr>
         <p:txBody>
@@ -2215,8 +2215,8 @@
         </p:nvSpPr>
         <p:spPr>
           <a:xfrm>
-            <a:off x="2368879" y="1426511"/>
-            <a:ext cx="2820888" cy="7040809"/>
+            <a:off x="2368879" y="1074512"/>
+            <a:ext cx="2820888" cy="5303452"/>
           </a:xfrm>
         </p:spPr>
         <p:txBody>
@@ -2280,8 +2280,8 @@
         </p:nvSpPr>
         <p:spPr>
           <a:xfrm>
-            <a:off x="383810" y="2972276"/>
-            <a:ext cx="1797155" cy="5506510"/>
+            <a:off x="383810" y="2238851"/>
+            <a:ext cx="1797155" cy="4147749"/>
           </a:xfrm>
         </p:spPr>
         <p:txBody>
@@ -2401,7 +2401,7 @@
     </p:spTree>
     <p:extLst>
       <p:ext uri="{BB962C8B-B14F-4D97-AF65-F5344CB8AC3E}">
-        <p14:creationId xmlns:p14="http://schemas.microsoft.com/office/powerpoint/2010/main" val="1232776319"/>
+        <p14:creationId xmlns:p14="http://schemas.microsoft.com/office/powerpoint/2010/main" val="4192018890"/>
       </p:ext>
     </p:extLst>
   </p:cSld>
@@ -2445,8 +2445,8 @@
         </p:nvSpPr>
         <p:spPr>
           <a:xfrm>
-            <a:off x="383084" y="527490"/>
-            <a:ext cx="4805958" cy="1915009"/>
+            <a:off x="383084" y="397329"/>
+            <a:ext cx="4805958" cy="1442470"/>
           </a:xfrm>
           <a:prstGeom prst="rect">
             <a:avLst/>
@@ -2478,8 +2478,8 @@
         </p:nvSpPr>
         <p:spPr>
           <a:xfrm>
-            <a:off x="383084" y="2637436"/>
-            <a:ext cx="4805958" cy="6286274"/>
+            <a:off x="383084" y="1986635"/>
+            <a:ext cx="4805958" cy="4735102"/>
           </a:xfrm>
           <a:prstGeom prst="rect">
             <a:avLst/>
@@ -2540,8 +2540,8 @@
         </p:nvSpPr>
         <p:spPr>
           <a:xfrm>
-            <a:off x="383084" y="9182869"/>
-            <a:ext cx="1253728" cy="527487"/>
+            <a:off x="383084" y="6916947"/>
+            <a:ext cx="1253728" cy="397327"/>
           </a:xfrm>
           <a:prstGeom prst="rect">
             <a:avLst/>
@@ -2581,8 +2581,8 @@
         </p:nvSpPr>
         <p:spPr>
           <a:xfrm>
-            <a:off x="1845767" y="9182869"/>
-            <a:ext cx="1880592" cy="527487"/>
+            <a:off x="1845767" y="6916947"/>
+            <a:ext cx="1880592" cy="397327"/>
           </a:xfrm>
           <a:prstGeom prst="rect">
             <a:avLst/>
@@ -2618,8 +2618,8 @@
         </p:nvSpPr>
         <p:spPr>
           <a:xfrm>
-            <a:off x="3935313" y="9182869"/>
-            <a:ext cx="1253728" cy="527487"/>
+            <a:off x="3935313" y="6916947"/>
+            <a:ext cx="1253728" cy="397327"/>
           </a:xfrm>
           <a:prstGeom prst="rect">
             <a:avLst/>
@@ -2650,23 +2650,23 @@
     </p:spTree>
     <p:extLst>
       <p:ext uri="{BB962C8B-B14F-4D97-AF65-F5344CB8AC3E}">
-        <p14:creationId xmlns:p14="http://schemas.microsoft.com/office/powerpoint/2010/main" val="3085000452"/>
+        <p14:creationId xmlns:p14="http://schemas.microsoft.com/office/powerpoint/2010/main" val="1162242172"/>
       </p:ext>
     </p:extLst>
   </p:cSld>
   <p:clrMap bg1="lt1" tx1="dk1" bg2="lt2" tx2="dk2" accent1="accent1" accent2="accent2" accent3="accent3" accent4="accent4" accent5="accent5" accent6="accent6" hlink="hlink" folHlink="folHlink"/>
   <p:sldLayoutIdLst>
-    <p:sldLayoutId id="2147483697" r:id="rId1"/>
-    <p:sldLayoutId id="2147483698" r:id="rId2"/>
-    <p:sldLayoutId id="2147483699" r:id="rId3"/>
-    <p:sldLayoutId id="2147483700" r:id="rId4"/>
-    <p:sldLayoutId id="2147483701" r:id="rId5"/>
-    <p:sldLayoutId id="2147483702" r:id="rId6"/>
-    <p:sldLayoutId id="2147483703" r:id="rId7"/>
-    <p:sldLayoutId id="2147483704" r:id="rId8"/>
-    <p:sldLayoutId id="2147483705" r:id="rId9"/>
-    <p:sldLayoutId id="2147483706" r:id="rId10"/>
-    <p:sldLayoutId id="2147483707" r:id="rId11"/>
+    <p:sldLayoutId id="2147483709" r:id="rId1"/>
+    <p:sldLayoutId id="2147483710" r:id="rId2"/>
+    <p:sldLayoutId id="2147483711" r:id="rId3"/>
+    <p:sldLayoutId id="2147483712" r:id="rId4"/>
+    <p:sldLayoutId id="2147483713" r:id="rId5"/>
+    <p:sldLayoutId id="2147483714" r:id="rId6"/>
+    <p:sldLayoutId id="2147483715" r:id="rId7"/>
+    <p:sldLayoutId id="2147483716" r:id="rId8"/>
+    <p:sldLayoutId id="2147483717" r:id="rId9"/>
+    <p:sldLayoutId id="2147483718" r:id="rId10"/>
+    <p:sldLayoutId id="2147483719" r:id="rId11"/>
   </p:sldLayoutIdLst>
   <p:txStyles>
     <p:titleStyle>
@@ -2970,10 +2970,10 @@
       </p:grpSpPr>
       <p:pic>
         <p:nvPicPr>
-          <p:cNvPr id="5" name="그림 4" descr="텍스트, 스크린샷, 멀티미디어 소프트웨어, 디자인이(가) 표시된 사진&#10;&#10;AI가 생성한 콘텐츠는 부정확할 수 있습니다.">
+          <p:cNvPr id="7" name="그림 6" descr="텍스트, 스크린샷, 소프트웨어, 폰트이(가) 표시된 사진&#10;&#10;AI가 생성한 콘텐츠는 부정확할 수 있습니다.">
             <a:extLst>
               <a:ext uri="{FF2B5EF4-FFF2-40B4-BE49-F238E27FC236}">
-                <a16:creationId xmlns:a16="http://schemas.microsoft.com/office/drawing/2014/main" id="{D2130D25-9CF7-FC57-1610-C020B90760B6}"/>
+                <a16:creationId xmlns:a16="http://schemas.microsoft.com/office/drawing/2014/main" id="{07B1C051-C53E-B753-7D44-965980197D2B}"/>
               </a:ext>
             </a:extLst>
           </p:cNvPr>
@@ -2990,8 +2990,8 @@
         </p:blipFill>
         <p:spPr>
           <a:xfrm>
-            <a:off x="-1" y="0"/>
-            <a:ext cx="5572125" cy="9906000"/>
+            <a:off x="0" y="0"/>
+            <a:ext cx="5572252" cy="7462838"/>
           </a:xfrm>
           <a:prstGeom prst="rect">
             <a:avLst/>
